--- a/classes/parte-12-osint-e-ingenieria-social/252-osint-en-redes-sociales/clase-252-presentacion.pptx
+++ b/classes/parte-12-osint-e-ingenieria-social/252-osint-en-redes-sociales/clase-252-presentacion.pptx
@@ -18,6 +18,10 @@
     <p:sldId id="266" r:id="rId17"/>
     <p:sldId id="267" r:id="rId18"/>
     <p:sldId id="268" r:id="rId19"/>
+    <p:sldId id="269" r:id="rId20"/>
+    <p:sldId id="270" r:id="rId21"/>
+    <p:sldId id="271" r:id="rId22"/>
+    <p:sldId id="272" r:id="rId23"/>
   </p:sldIdLst>
   <p:sldSz cx="9144000" cy="6858000" type="screen4x3"/>
   <p:notesSz cx="6858000" cy="9144000"/>
@@ -3199,7 +3203,7 @@
                   <a:srgbClr val="0B3D2E"/>
                 </a:solidFill>
               </a:rPr>
-              <a:t>📝 Reto verificable</a:t>
+              <a:t>🧰 Herramientas y preparación</a:t>
             </a:r>
           </a:p>
         </p:txBody>
@@ -3237,52 +3241,67 @@
                   <a:srgbClr val="22282E"/>
                 </a:solidFill>
               </a:rPr>
-              <a:t>•  Entrega un informe SOCMINT de auto-exposición con al menos 8 señales, una correlación entre</a:t>
-            </a:r>
-          </a:p>
-          <a:p>
-            <a:pPr>
-              <a:spcAft>
-                <a:spcPts val="600"/>
-              </a:spcAft>
-            </a:pPr>
-            <a:r>
-              <a:rPr sz="1500">
-                <a:solidFill>
-                  <a:srgbClr val="22282E"/>
-                </a:solidFill>
-              </a:rPr>
-              <a:t>•  plataformas y un mapa de "pattern of life", más un plan de mitigación.</a:t>
-            </a:r>
-          </a:p>
-          <a:p>
-            <a:pPr>
-              <a:spcAft>
-                <a:spcPts val="600"/>
-              </a:spcAft>
-            </a:pPr>
-            <a:r>
-              <a:rPr sz="1500">
-                <a:solidFill>
-                  <a:srgbClr val="22282E"/>
-                </a:solidFill>
-              </a:rPr>
-              <a:t>•  Criterio de aceptación: el informe solo usa contenido público, cita la fuente de cada señal y</a:t>
-            </a:r>
-          </a:p>
-          <a:p>
-            <a:pPr>
-              <a:spcAft>
-                <a:spcPts val="600"/>
-              </a:spcAft>
-            </a:pPr>
-            <a:r>
-              <a:rPr sz="1500">
-                <a:solidFill>
-                  <a:srgbClr val="22282E"/>
-                </a:solidFill>
-              </a:rPr>
-              <a:t>•  propone al menos 5 acciones concretas de reducción de huella.</a:t>
+              <a:t>•  Sock puppets por plataforma, sin vínculo a tu identidad; navegador con contenedores.</a:t>
+            </a:r>
+          </a:p>
+          <a:p>
+            <a:pPr>
+              <a:spcAft>
+                <a:spcPts val="600"/>
+              </a:spcAft>
+            </a:pPr>
+            <a:r>
+              <a:rPr sz="1500">
+                <a:solidFill>
+                  <a:srgbClr val="22282E"/>
+                </a:solidFill>
+              </a:rPr>
+              <a:t>•  Búsqueda y agregación: operadores de búsqueda avanzados, whatsmyname, agregadores públicos.</a:t>
+            </a:r>
+          </a:p>
+          <a:p>
+            <a:pPr>
+              <a:spcAft>
+                <a:spcPts val="600"/>
+              </a:spcAft>
+            </a:pPr>
+            <a:r>
+              <a:rPr sz="1500">
+                <a:solidFill>
+                  <a:srgbClr val="22282E"/>
+                </a:solidFill>
+              </a:rPr>
+              <a:t>•  Análisis: capturas con marca de tiempo, hojas de correlación; para grafos, Maltego (Clase 255).</a:t>
+            </a:r>
+          </a:p>
+          <a:p>
+            <a:pPr>
+              <a:spcAft>
+                <a:spcPts val="600"/>
+              </a:spcAft>
+            </a:pPr>
+            <a:r>
+              <a:rPr sz="1500">
+                <a:solidFill>
+                  <a:srgbClr val="22282E"/>
+                </a:solidFill>
+              </a:rPr>
+              <a:t>•  Verificación de imágenes: búsqueda inversa (Google Lens, Yandex) — enlaza con la Clase 253.</a:t>
+            </a:r>
+          </a:p>
+          <a:p>
+            <a:pPr>
+              <a:spcAft>
+                <a:spcPts val="600"/>
+              </a:spcAft>
+            </a:pPr>
+            <a:r>
+              <a:rPr sz="1500">
+                <a:solidFill>
+                  <a:srgbClr val="22282E"/>
+                </a:solidFill>
+              </a:rPr>
+              <a:t>•  Recordatorio: solo contenido público; nada de solicitar amistad al objetivo fuera de un engagement.</a:t>
             </a:r>
           </a:p>
         </p:txBody>
@@ -3333,7 +3352,7 @@
                   <a:srgbClr val="0B3D2E"/>
                 </a:solidFill>
               </a:rPr>
-              <a:t>⚠️ Errores comunes</a:t>
+              <a:t>🧪 Laboratorio guiado</a:t>
             </a:r>
           </a:p>
         </p:txBody>
@@ -3371,67 +3390,97 @@
                   <a:srgbClr val="22282E"/>
                 </a:solidFill>
               </a:rPr>
-              <a:t>•  Cuenta baneada/limitada — Scraping agresivo o sock puppet inconsistente. Reduce ritmo, mejora la coherencia del perfil.</a:t>
-            </a:r>
-          </a:p>
-          <a:p>
-            <a:pPr>
-              <a:spcAft>
-                <a:spcPts val="600"/>
-              </a:spcAft>
-            </a:pPr>
-            <a:r>
-              <a:rPr sz="1500">
-                <a:solidFill>
-                  <a:srgbClr val="22282E"/>
-                </a:solidFill>
-              </a:rPr>
-              <a:t>•  Correlación equivocada — Estilo similar no es prueba. Exige múltiples indicios convergentes.</a:t>
-            </a:r>
-          </a:p>
-          <a:p>
-            <a:pPr>
-              <a:spcAft>
-                <a:spcPts val="600"/>
-              </a:spcAft>
-            </a:pPr>
-            <a:r>
-              <a:rPr sz="1500">
-                <a:solidFill>
-                  <a:srgbClr val="22282E"/>
-                </a:solidFill>
-              </a:rPr>
-              <a:t>•  Filtración de tu identidad — Diste "like" o seguiste con tu cuenta real. Usa siempre el sock puppet.</a:t>
-            </a:r>
-          </a:p>
-          <a:p>
-            <a:pPr>
-              <a:spcAft>
-                <a:spcPts val="600"/>
-              </a:spcAft>
-            </a:pPr>
-            <a:r>
-              <a:rPr sz="1500">
-                <a:solidFill>
-                  <a:srgbClr val="22282E"/>
-                </a:solidFill>
-              </a:rPr>
-              <a:t>•  Datos privados en el informe — Se incluyó contenido no público. Elimínalo; solo va lo público.</a:t>
-            </a:r>
-          </a:p>
-          <a:p>
-            <a:pPr>
-              <a:spcAft>
-                <a:spcPts val="600"/>
-              </a:spcAft>
-            </a:pPr>
-            <a:r>
-              <a:rPr sz="1500">
-                <a:solidFill>
-                  <a:srgbClr val="22282E"/>
-                </a:solidFill>
-              </a:rPr>
-              <a:t>•  Geotag mal interpretado — Ubicación de la foto ≠ ubicación de residencia. Corrobora con más datos.</a:t>
+              <a:t>•  Objetivo: tus propias cuentas o una cuenta pública de prueba/consentida.</a:t>
+            </a:r>
+          </a:p>
+          <a:p>
+            <a:pPr>
+              <a:spcAft>
+                <a:spcPts val="600"/>
+              </a:spcAft>
+            </a:pPr>
+            <a:r>
+              <a:rPr sz="1500">
+                <a:solidFill>
+                  <a:srgbClr val="22282E"/>
+                </a:solidFill>
+              </a:rPr>
+              <a:t>•  Inventaria tus perfiles públicos y captura cada bio, foto y enlace con fecha.</a:t>
+            </a:r>
+          </a:p>
+          <a:p>
+            <a:pPr>
+              <a:spcAft>
+                <a:spcPts val="600"/>
+              </a:spcAft>
+            </a:pPr>
+            <a:r>
+              <a:rPr sz="1500">
+                <a:solidFill>
+                  <a:srgbClr val="22282E"/>
+                </a:solidFill>
+              </a:rPr>
+              <a:t>•  Extrae señales: ubicación declarada, empleador, intereses, cuentas enlazadas.</a:t>
+            </a:r>
+          </a:p>
+          <a:p>
+            <a:pPr>
+              <a:spcAft>
+                <a:spcPts val="600"/>
+              </a:spcAft>
+            </a:pPr>
+            <a:r>
+              <a:rPr sz="1500">
+                <a:solidFill>
+                  <a:srgbClr val="22282E"/>
+                </a:solidFill>
+              </a:rPr>
+              <a:t>•  Correlaciona un alias entre plataformas con whatsmyname y verifica manualmente.</a:t>
+            </a:r>
+          </a:p>
+          <a:p>
+            <a:pPr>
+              <a:spcAft>
+                <a:spcPts val="600"/>
+              </a:spcAft>
+            </a:pPr>
+            <a:r>
+              <a:rPr sz="1500">
+                <a:solidFill>
+                  <a:srgbClr val="22282E"/>
+                </a:solidFill>
+              </a:rPr>
+              <a:t>•  Busca geotags: revisa publicaciones públicas con ubicación y traza un mapa de lugares frecuentes.</a:t>
+            </a:r>
+          </a:p>
+          <a:p>
+            <a:pPr>
+              <a:spcAft>
+                <a:spcPts val="600"/>
+              </a:spcAft>
+            </a:pPr>
+            <a:r>
+              <a:rPr sz="1500">
+                <a:solidFill>
+                  <a:srgbClr val="22282E"/>
+                </a:solidFill>
+              </a:rPr>
+              <a:t>•  Deriva un pattern of life aproximado (horarios de publicación, días activos).</a:t>
+            </a:r>
+          </a:p>
+          <a:p>
+            <a:pPr>
+              <a:spcAft>
+                <a:spcPts val="600"/>
+              </a:spcAft>
+            </a:pPr>
+            <a:r>
+              <a:rPr sz="1500">
+                <a:solidFill>
+                  <a:srgbClr val="22282E"/>
+                </a:solidFill>
+              </a:rPr>
+              <a:t>•  Simula la perspectiva de un atacante: ¿qué pretexto construirías con estos datos?</a:t>
             </a:r>
           </a:p>
         </p:txBody>
@@ -3482,7 +3531,7 @@
                   <a:srgbClr val="0B3D2E"/>
                 </a:solidFill>
               </a:rPr>
-              <a:t>❓ Preguntas frecuentes</a:t>
+              <a:t>✍️ Ejercicios</a:t>
             </a:r>
           </a:p>
         </p:txBody>
@@ -3520,97 +3569,82 @@
                   <a:srgbClr val="22282E"/>
                 </a:solidFill>
               </a:rPr>
-              <a:t>•  ❓ ¿Puedo pedir amistad al objetivo para ver su contenido?</a:t>
-            </a:r>
-          </a:p>
-          <a:p>
-            <a:pPr>
-              <a:spcAft>
-                <a:spcPts val="600"/>
-              </a:spcAft>
-            </a:pPr>
-            <a:r>
-              <a:rPr sz="1500">
-                <a:solidFill>
-                  <a:srgbClr val="22282E"/>
-                </a:solidFill>
-              </a:rPr>
-              <a:t>•  Solo dentro de un engagement autorizado con reglas claras. Fuera de eso es manipulación y puede ser</a:t>
-            </a:r>
-          </a:p>
-          <a:p>
-            <a:pPr>
-              <a:spcAft>
-                <a:spcPts val="600"/>
-              </a:spcAft>
-            </a:pPr>
-            <a:r>
-              <a:rPr sz="1500">
-                <a:solidFill>
-                  <a:srgbClr val="22282E"/>
-                </a:solidFill>
-              </a:rPr>
-              <a:t>•  ilegal o violar ToS.</a:t>
-            </a:r>
-          </a:p>
-          <a:p>
-            <a:pPr>
-              <a:spcAft>
-                <a:spcPts val="600"/>
-              </a:spcAft>
-            </a:pPr>
-            <a:r>
-              <a:rPr sz="1500">
-                <a:solidFill>
-                  <a:srgbClr val="22282E"/>
-                </a:solidFill>
-              </a:rPr>
-              <a:t>•  ❓ ¿El scraping es legal?</a:t>
-            </a:r>
-          </a:p>
-          <a:p>
-            <a:pPr>
-              <a:spcAft>
-                <a:spcPts val="600"/>
-              </a:spcAft>
-            </a:pPr>
-            <a:r>
-              <a:rPr sz="1500">
-                <a:solidFill>
-                  <a:srgbClr val="22282E"/>
-                </a:solidFill>
-              </a:rPr>
-              <a:t>•  Depende de la jurisdicción y los ToS. El contenido público tiene menos protección, pero automatizar</a:t>
-            </a:r>
-          </a:p>
-          <a:p>
-            <a:pPr>
-              <a:spcAft>
-                <a:spcPts val="600"/>
-              </a:spcAft>
-            </a:pPr>
-            <a:r>
-              <a:rPr sz="1500">
-                <a:solidFill>
-                  <a:srgbClr val="22282E"/>
-                </a:solidFill>
-              </a:rPr>
-              <a:t>•  extracciones suele violar términos y puede tener consecuencias legales.</a:t>
-            </a:r>
-          </a:p>
-          <a:p>
-            <a:pPr>
-              <a:spcAft>
-                <a:spcPts val="600"/>
-              </a:spcAft>
-            </a:pPr>
-            <a:r>
-              <a:rPr sz="1500">
-                <a:solidFill>
-                  <a:srgbClr val="22282E"/>
-                </a:solidFill>
-              </a:rPr>
-              <a:t>•  ❓ ¿Qué es lo más peligroso que expone la gente?</a:t>
+              <a:t>•  Analiza un perfil propio y lista 10 señales OSINT ordenadas por sensibilidad.</a:t>
+            </a:r>
+          </a:p>
+          <a:p>
+            <a:pPr>
+              <a:spcAft>
+                <a:spcPts val="600"/>
+              </a:spcAft>
+            </a:pPr>
+            <a:r>
+              <a:rPr sz="1500">
+                <a:solidFill>
+                  <a:srgbClr val="22282E"/>
+                </a:solidFill>
+              </a:rPr>
+              <a:t>•  Explica por qué el "pattern of life" es peligroso incluso sin datos "secretos".</a:t>
+            </a:r>
+          </a:p>
+          <a:p>
+            <a:pPr>
+              <a:spcAft>
+                <a:spcPts val="600"/>
+              </a:spcAft>
+            </a:pPr>
+            <a:r>
+              <a:rPr sz="1500">
+                <a:solidFill>
+                  <a:srgbClr val="22282E"/>
+                </a:solidFill>
+              </a:rPr>
+              <a:t>•  Correlaciona dos cuentas por estilo, foto o enlaces y asigna un nivel de confianza.</a:t>
+            </a:r>
+          </a:p>
+          <a:p>
+            <a:pPr>
+              <a:spcAft>
+                <a:spcPts val="600"/>
+              </a:spcAft>
+            </a:pPr>
+            <a:r>
+              <a:rPr sz="1500">
+                <a:solidFill>
+                  <a:srgbClr val="22282E"/>
+                </a:solidFill>
+              </a:rPr>
+              <a:t>•  Encuentra una publicación con geotag y descríbela sin exponer datos de terceros.</a:t>
+            </a:r>
+          </a:p>
+          <a:p>
+            <a:pPr>
+              <a:spcAft>
+                <a:spcPts val="600"/>
+              </a:spcAft>
+            </a:pPr>
+            <a:r>
+              <a:rPr sz="1500">
+                <a:solidFill>
+                  <a:srgbClr val="22282E"/>
+                </a:solidFill>
+              </a:rPr>
+              <a:t>•  Redacta una política de 5 puntos para que empleados no filtren datos corporativos.</a:t>
+            </a:r>
+          </a:p>
+          <a:p>
+            <a:pPr>
+              <a:spcAft>
+                <a:spcPts val="600"/>
+              </a:spcAft>
+            </a:pPr>
+            <a:r>
+              <a:rPr sz="1500">
+                <a:solidFill>
+                  <a:srgbClr val="22282E"/>
+                </a:solidFill>
+              </a:rPr>
+              <a:t>•  Investiga qué prohíben los ToS de una red sobre scraping y automatización.</a:t>
             </a:r>
           </a:p>
         </p:txBody>
@@ -3661,7 +3695,7 @@
                   <a:srgbClr val="0B3D2E"/>
                 </a:solidFill>
               </a:rPr>
-              <a:t>🔗 Referencias</a:t>
+              <a:t>📝 Reto verificable</a:t>
             </a:r>
           </a:p>
         </p:txBody>
@@ -3699,6 +3733,468 @@
                   <a:srgbClr val="22282E"/>
                 </a:solidFill>
               </a:rPr>
+              <a:t>•  Entrega un informe SOCMINT de auto-exposición con al menos 8 señales, una correlación entre</a:t>
+            </a:r>
+          </a:p>
+          <a:p>
+            <a:pPr>
+              <a:spcAft>
+                <a:spcPts val="600"/>
+              </a:spcAft>
+            </a:pPr>
+            <a:r>
+              <a:rPr sz="1500">
+                <a:solidFill>
+                  <a:srgbClr val="22282E"/>
+                </a:solidFill>
+              </a:rPr>
+              <a:t>•  plataformas y un mapa de "pattern of life", más un plan de mitigación.</a:t>
+            </a:r>
+          </a:p>
+          <a:p>
+            <a:pPr>
+              <a:spcAft>
+                <a:spcPts val="600"/>
+              </a:spcAft>
+            </a:pPr>
+            <a:r>
+              <a:rPr sz="1500">
+                <a:solidFill>
+                  <a:srgbClr val="22282E"/>
+                </a:solidFill>
+              </a:rPr>
+              <a:t>•  Criterio de aceptación: el informe solo usa contenido público, cita la fuente de cada señal y</a:t>
+            </a:r>
+          </a:p>
+          <a:p>
+            <a:pPr>
+              <a:spcAft>
+                <a:spcPts val="600"/>
+              </a:spcAft>
+            </a:pPr>
+            <a:r>
+              <a:rPr sz="1500">
+                <a:solidFill>
+                  <a:srgbClr val="22282E"/>
+                </a:solidFill>
+              </a:rPr>
+              <a:t>•  propone al menos 5 acciones concretas de reducción de huella.</a:t>
+            </a:r>
+          </a:p>
+        </p:txBody>
+      </p:sp>
+    </p:spTree>
+  </p:cSld>
+  <p:clrMapOvr>
+    <a:masterClrMapping/>
+  </p:clrMapOvr>
+</p:sld>
+</file>
+
+<file path=ppt/slides/slide14.xml><?xml version="1.0" encoding="utf-8"?>
+<p:sld xmlns:a="http://schemas.openxmlformats.org/drawingml/2006/main" xmlns:p="http://schemas.openxmlformats.org/presentationml/2006/main" xmlns:r="http://schemas.openxmlformats.org/officeDocument/2006/relationships">
+  <p:cSld>
+    <p:spTree>
+      <p:nvGrpSpPr>
+        <p:cNvPr id="1" name=""/>
+        <p:cNvGrpSpPr/>
+        <p:nvPr/>
+      </p:nvGrpSpPr>
+      <p:grpSpPr/>
+      <p:sp>
+        <p:nvSpPr>
+          <p:cNvPr id="2" name="TextBox 1"/>
+          <p:cNvSpPr txBox="1"/>
+          <p:nvPr/>
+        </p:nvSpPr>
+        <p:spPr>
+          <a:xfrm>
+            <a:off x="457200" y="320040"/>
+            <a:ext cx="8229600" cy="822960"/>
+          </a:xfrm>
+          <a:prstGeom prst="rect">
+            <a:avLst/>
+          </a:prstGeom>
+          <a:noFill/>
+        </p:spPr>
+        <p:txBody>
+          <a:bodyPr wrap="square">
+            <a:spAutoFit/>
+          </a:bodyPr>
+          <a:lstStyle/>
+          <a:p>
+            <a:r>
+              <a:rPr sz="2600" b="1">
+                <a:solidFill>
+                  <a:srgbClr val="0B3D2E"/>
+                </a:solidFill>
+              </a:rPr>
+              <a:t>⚠️ Errores comunes</a:t>
+            </a:r>
+          </a:p>
+        </p:txBody>
+      </p:sp>
+      <p:sp>
+        <p:nvSpPr>
+          <p:cNvPr id="3" name="TextBox 2"/>
+          <p:cNvSpPr txBox="1"/>
+          <p:nvPr/>
+        </p:nvSpPr>
+        <p:spPr>
+          <a:xfrm>
+            <a:off x="457200" y="1280160"/>
+            <a:ext cx="8229600" cy="4937760"/>
+          </a:xfrm>
+          <a:prstGeom prst="rect">
+            <a:avLst/>
+          </a:prstGeom>
+          <a:noFill/>
+        </p:spPr>
+        <p:txBody>
+          <a:bodyPr wrap="square">
+            <a:spAutoFit/>
+          </a:bodyPr>
+          <a:lstStyle/>
+          <a:p>
+            <a:pPr>
+              <a:spcAft>
+                <a:spcPts val="600"/>
+              </a:spcAft>
+            </a:pPr>
+            <a:r>
+              <a:rPr sz="1500">
+                <a:solidFill>
+                  <a:srgbClr val="22282E"/>
+                </a:solidFill>
+              </a:rPr>
+              <a:t>•  Cuenta baneada/limitada — Scraping agresivo o sock puppet inconsistente. Reduce ritmo, mejora la coherencia del perfil.</a:t>
+            </a:r>
+          </a:p>
+          <a:p>
+            <a:pPr>
+              <a:spcAft>
+                <a:spcPts val="600"/>
+              </a:spcAft>
+            </a:pPr>
+            <a:r>
+              <a:rPr sz="1500">
+                <a:solidFill>
+                  <a:srgbClr val="22282E"/>
+                </a:solidFill>
+              </a:rPr>
+              <a:t>•  Correlación equivocada — Estilo similar no es prueba. Exige múltiples indicios convergentes.</a:t>
+            </a:r>
+          </a:p>
+          <a:p>
+            <a:pPr>
+              <a:spcAft>
+                <a:spcPts val="600"/>
+              </a:spcAft>
+            </a:pPr>
+            <a:r>
+              <a:rPr sz="1500">
+                <a:solidFill>
+                  <a:srgbClr val="22282E"/>
+                </a:solidFill>
+              </a:rPr>
+              <a:t>•  Filtración de tu identidad — Diste "like" o seguiste con tu cuenta real. Usa siempre el sock puppet.</a:t>
+            </a:r>
+          </a:p>
+          <a:p>
+            <a:pPr>
+              <a:spcAft>
+                <a:spcPts val="600"/>
+              </a:spcAft>
+            </a:pPr>
+            <a:r>
+              <a:rPr sz="1500">
+                <a:solidFill>
+                  <a:srgbClr val="22282E"/>
+                </a:solidFill>
+              </a:rPr>
+              <a:t>•  Datos privados en el informe — Se incluyó contenido no público. Elimínalo; solo va lo público.</a:t>
+            </a:r>
+          </a:p>
+          <a:p>
+            <a:pPr>
+              <a:spcAft>
+                <a:spcPts val="600"/>
+              </a:spcAft>
+            </a:pPr>
+            <a:r>
+              <a:rPr sz="1500">
+                <a:solidFill>
+                  <a:srgbClr val="22282E"/>
+                </a:solidFill>
+              </a:rPr>
+              <a:t>•  Geotag mal interpretado — Ubicación de la foto ≠ ubicación de residencia. Corrobora con más datos.</a:t>
+            </a:r>
+          </a:p>
+        </p:txBody>
+      </p:sp>
+    </p:spTree>
+  </p:cSld>
+  <p:clrMapOvr>
+    <a:masterClrMapping/>
+  </p:clrMapOvr>
+</p:sld>
+</file>
+
+<file path=ppt/slides/slide15.xml><?xml version="1.0" encoding="utf-8"?>
+<p:sld xmlns:a="http://schemas.openxmlformats.org/drawingml/2006/main" xmlns:p="http://schemas.openxmlformats.org/presentationml/2006/main" xmlns:r="http://schemas.openxmlformats.org/officeDocument/2006/relationships">
+  <p:cSld>
+    <p:spTree>
+      <p:nvGrpSpPr>
+        <p:cNvPr id="1" name=""/>
+        <p:cNvGrpSpPr/>
+        <p:nvPr/>
+      </p:nvGrpSpPr>
+      <p:grpSpPr/>
+      <p:sp>
+        <p:nvSpPr>
+          <p:cNvPr id="2" name="TextBox 1"/>
+          <p:cNvSpPr txBox="1"/>
+          <p:nvPr/>
+        </p:nvSpPr>
+        <p:spPr>
+          <a:xfrm>
+            <a:off x="457200" y="320040"/>
+            <a:ext cx="8229600" cy="822960"/>
+          </a:xfrm>
+          <a:prstGeom prst="rect">
+            <a:avLst/>
+          </a:prstGeom>
+          <a:noFill/>
+        </p:spPr>
+        <p:txBody>
+          <a:bodyPr wrap="square">
+            <a:spAutoFit/>
+          </a:bodyPr>
+          <a:lstStyle/>
+          <a:p>
+            <a:r>
+              <a:rPr sz="2600" b="1">
+                <a:solidFill>
+                  <a:srgbClr val="0B3D2E"/>
+                </a:solidFill>
+              </a:rPr>
+              <a:t>❓ Preguntas frecuentes</a:t>
+            </a:r>
+          </a:p>
+        </p:txBody>
+      </p:sp>
+      <p:sp>
+        <p:nvSpPr>
+          <p:cNvPr id="3" name="TextBox 2"/>
+          <p:cNvSpPr txBox="1"/>
+          <p:nvPr/>
+        </p:nvSpPr>
+        <p:spPr>
+          <a:xfrm>
+            <a:off x="457200" y="1280160"/>
+            <a:ext cx="8229600" cy="4937760"/>
+          </a:xfrm>
+          <a:prstGeom prst="rect">
+            <a:avLst/>
+          </a:prstGeom>
+          <a:noFill/>
+        </p:spPr>
+        <p:txBody>
+          <a:bodyPr wrap="square">
+            <a:spAutoFit/>
+          </a:bodyPr>
+          <a:lstStyle/>
+          <a:p>
+            <a:pPr>
+              <a:spcAft>
+                <a:spcPts val="600"/>
+              </a:spcAft>
+            </a:pPr>
+            <a:r>
+              <a:rPr sz="1500">
+                <a:solidFill>
+                  <a:srgbClr val="22282E"/>
+                </a:solidFill>
+              </a:rPr>
+              <a:t>•  ❓ ¿Puedo pedir amistad al objetivo para ver su contenido?</a:t>
+            </a:r>
+          </a:p>
+          <a:p>
+            <a:pPr>
+              <a:spcAft>
+                <a:spcPts val="600"/>
+              </a:spcAft>
+            </a:pPr>
+            <a:r>
+              <a:rPr sz="1500">
+                <a:solidFill>
+                  <a:srgbClr val="22282E"/>
+                </a:solidFill>
+              </a:rPr>
+              <a:t>•  Solo dentro de un engagement autorizado con reglas claras. Fuera de eso es manipulación y puede ser</a:t>
+            </a:r>
+          </a:p>
+          <a:p>
+            <a:pPr>
+              <a:spcAft>
+                <a:spcPts val="600"/>
+              </a:spcAft>
+            </a:pPr>
+            <a:r>
+              <a:rPr sz="1500">
+                <a:solidFill>
+                  <a:srgbClr val="22282E"/>
+                </a:solidFill>
+              </a:rPr>
+              <a:t>•  ilegal o violar ToS.</a:t>
+            </a:r>
+          </a:p>
+          <a:p>
+            <a:pPr>
+              <a:spcAft>
+                <a:spcPts val="600"/>
+              </a:spcAft>
+            </a:pPr>
+            <a:r>
+              <a:rPr sz="1500">
+                <a:solidFill>
+                  <a:srgbClr val="22282E"/>
+                </a:solidFill>
+              </a:rPr>
+              <a:t>•  ❓ ¿El scraping es legal?</a:t>
+            </a:r>
+          </a:p>
+          <a:p>
+            <a:pPr>
+              <a:spcAft>
+                <a:spcPts val="600"/>
+              </a:spcAft>
+            </a:pPr>
+            <a:r>
+              <a:rPr sz="1500">
+                <a:solidFill>
+                  <a:srgbClr val="22282E"/>
+                </a:solidFill>
+              </a:rPr>
+              <a:t>•  Depende de la jurisdicción y los ToS. El contenido público tiene menos protección, pero automatizar</a:t>
+            </a:r>
+          </a:p>
+          <a:p>
+            <a:pPr>
+              <a:spcAft>
+                <a:spcPts val="600"/>
+              </a:spcAft>
+            </a:pPr>
+            <a:r>
+              <a:rPr sz="1500">
+                <a:solidFill>
+                  <a:srgbClr val="22282E"/>
+                </a:solidFill>
+              </a:rPr>
+              <a:t>•  extracciones suele violar términos y puede tener consecuencias legales.</a:t>
+            </a:r>
+          </a:p>
+          <a:p>
+            <a:pPr>
+              <a:spcAft>
+                <a:spcPts val="600"/>
+              </a:spcAft>
+            </a:pPr>
+            <a:r>
+              <a:rPr sz="1500">
+                <a:solidFill>
+                  <a:srgbClr val="22282E"/>
+                </a:solidFill>
+              </a:rPr>
+              <a:t>•  ❓ ¿Qué es lo más peligroso que expone la gente?</a:t>
+            </a:r>
+          </a:p>
+        </p:txBody>
+      </p:sp>
+    </p:spTree>
+  </p:cSld>
+  <p:clrMapOvr>
+    <a:masterClrMapping/>
+  </p:clrMapOvr>
+</p:sld>
+</file>
+
+<file path=ppt/slides/slide16.xml><?xml version="1.0" encoding="utf-8"?>
+<p:sld xmlns:a="http://schemas.openxmlformats.org/drawingml/2006/main" xmlns:p="http://schemas.openxmlformats.org/presentationml/2006/main" xmlns:r="http://schemas.openxmlformats.org/officeDocument/2006/relationships">
+  <p:cSld>
+    <p:spTree>
+      <p:nvGrpSpPr>
+        <p:cNvPr id="1" name=""/>
+        <p:cNvGrpSpPr/>
+        <p:nvPr/>
+      </p:nvGrpSpPr>
+      <p:grpSpPr/>
+      <p:sp>
+        <p:nvSpPr>
+          <p:cNvPr id="2" name="TextBox 1"/>
+          <p:cNvSpPr txBox="1"/>
+          <p:nvPr/>
+        </p:nvSpPr>
+        <p:spPr>
+          <a:xfrm>
+            <a:off x="457200" y="320040"/>
+            <a:ext cx="8229600" cy="822960"/>
+          </a:xfrm>
+          <a:prstGeom prst="rect">
+            <a:avLst/>
+          </a:prstGeom>
+          <a:noFill/>
+        </p:spPr>
+        <p:txBody>
+          <a:bodyPr wrap="square">
+            <a:spAutoFit/>
+          </a:bodyPr>
+          <a:lstStyle/>
+          <a:p>
+            <a:r>
+              <a:rPr sz="2600" b="1">
+                <a:solidFill>
+                  <a:srgbClr val="0B3D2E"/>
+                </a:solidFill>
+              </a:rPr>
+              <a:t>🔗 Referencias</a:t>
+            </a:r>
+          </a:p>
+        </p:txBody>
+      </p:sp>
+      <p:sp>
+        <p:nvSpPr>
+          <p:cNvPr id="3" name="TextBox 2"/>
+          <p:cNvSpPr txBox="1"/>
+          <p:nvPr/>
+        </p:nvSpPr>
+        <p:spPr>
+          <a:xfrm>
+            <a:off x="457200" y="1280160"/>
+            <a:ext cx="8229600" cy="4937760"/>
+          </a:xfrm>
+          <a:prstGeom prst="rect">
+            <a:avLst/>
+          </a:prstGeom>
+          <a:noFill/>
+        </p:spPr>
+        <p:txBody>
+          <a:bodyPr wrap="square">
+            <a:spAutoFit/>
+          </a:bodyPr>
+          <a:lstStyle/>
+          <a:p>
+            <a:pPr>
+              <a:spcAft>
+                <a:spcPts val="600"/>
+              </a:spcAft>
+            </a:pPr>
+            <a:r>
+              <a:rPr sz="1500">
+                <a:solidFill>
+                  <a:srgbClr val="22282E"/>
+                </a:solidFill>
+              </a:rPr>
               <a:t>•  Bazzell, M. Open Source Intelligence Techniques. &lt;https://inteltechniques.com/book1.html&gt;</a:t>
             </a:r>
           </a:p>
@@ -3749,6 +4245,81 @@
           </a:p>
         </p:txBody>
       </p:sp>
+    </p:spTree>
+  </p:cSld>
+  <p:clrMapOvr>
+    <a:masterClrMapping/>
+  </p:clrMapOvr>
+</p:sld>
+</file>
+
+<file path=ppt/slides/slide17.xml><?xml version="1.0" encoding="utf-8"?>
+<p:sld xmlns:a="http://schemas.openxmlformats.org/drawingml/2006/main" xmlns:p="http://schemas.openxmlformats.org/presentationml/2006/main" xmlns:r="http://schemas.openxmlformats.org/officeDocument/2006/relationships">
+  <p:cSld>
+    <p:spTree>
+      <p:nvGrpSpPr>
+        <p:cNvPr id="1" name=""/>
+        <p:cNvGrpSpPr/>
+        <p:nvPr/>
+      </p:nvGrpSpPr>
+      <p:grpSpPr/>
+      <p:sp>
+        <p:nvSpPr>
+          <p:cNvPr id="2" name="TextBox 1"/>
+          <p:cNvSpPr txBox="1"/>
+          <p:nvPr/>
+        </p:nvSpPr>
+        <p:spPr>
+          <a:xfrm>
+            <a:off x="457200" y="274320"/>
+            <a:ext cx="8229600" cy="640080"/>
+          </a:xfrm>
+          <a:prstGeom prst="rect">
+            <a:avLst/>
+          </a:prstGeom>
+          <a:noFill/>
+        </p:spPr>
+        <p:txBody>
+          <a:bodyPr wrap="square">
+            <a:spAutoFit/>
+          </a:bodyPr>
+          <a:lstStyle/>
+          <a:p>
+            <a:r>
+              <a:rPr sz="2200" b="1">
+                <a:solidFill>
+                  <a:srgbClr val="0B3D2E"/>
+                </a:solidFill>
+              </a:rPr>
+              <a:t>Diagrama de la clase</a:t>
+            </a:r>
+          </a:p>
+        </p:txBody>
+      </p:sp>
+      <p:pic>
+        <p:nvPicPr>
+          <p:cNvPr id="3" name="Picture 2" descr="c511829b1b739307.png"/>
+          <p:cNvPicPr>
+            <a:picLocks noChangeAspect="1"/>
+          </p:cNvPicPr>
+          <p:nvPr/>
+        </p:nvPicPr>
+        <p:blipFill>
+          <a:blip r:embed="rId2"/>
+          <a:stretch>
+            <a:fillRect/>
+          </a:stretch>
+        </p:blipFill>
+        <p:spPr>
+          <a:xfrm>
+            <a:off x="457200" y="2807208"/>
+            <a:ext cx="8229600" cy="1883664"/>
+          </a:xfrm>
+          <a:prstGeom prst="rect">
+            <a:avLst/>
+          </a:prstGeom>
+        </p:spPr>
+      </p:pic>
     </p:spTree>
   </p:cSld>
   <p:clrMapOvr>
@@ -4406,7 +4977,7 @@
                   <a:srgbClr val="0B3D2E"/>
                 </a:solidFill>
               </a:rPr>
-              <a:t>📖 Definiciones y características</a:t>
+              <a:t>🧠 Explicación en profundidad</a:t>
             </a:r>
           </a:p>
         </p:txBody>
@@ -4444,82 +5015,67 @@
                   <a:srgbClr val="22282E"/>
                 </a:solidFill>
               </a:rPr>
-              <a:t>•  SOCMINT: inteligencia derivada de redes sociales. Característica: alta densidad de datos personales, alto riesgo ético.</a:t>
-            </a:r>
-          </a:p>
-          <a:p>
-            <a:pPr>
-              <a:spcAft>
-                <a:spcPts val="600"/>
-              </a:spcAft>
-            </a:pPr>
-            <a:r>
-              <a:rPr sz="1500">
-                <a:solidFill>
-                  <a:srgbClr val="22282E"/>
-                </a:solidFill>
-              </a:rPr>
-              <a:t>•  Geotag: metadato o etiqueta de ubicación en una publicación. Característica: permite reconstruir movimientos.</a:t>
-            </a:r>
-          </a:p>
-          <a:p>
-            <a:pPr>
-              <a:spcAft>
-                <a:spcPts val="600"/>
-              </a:spcAft>
-            </a:pPr>
-            <a:r>
-              <a:rPr sz="1500">
-                <a:solidFill>
-                  <a:srgbClr val="22282E"/>
-                </a:solidFill>
-              </a:rPr>
-              <a:t>•  Análisis de red social: estudio de conexiones entre cuentas. Característica: revela círculos y personas clave.</a:t>
-            </a:r>
-          </a:p>
-          <a:p>
-            <a:pPr>
-              <a:spcAft>
-                <a:spcPts val="600"/>
-              </a:spcAft>
-            </a:pPr>
-            <a:r>
-              <a:rPr sz="1500">
-                <a:solidFill>
-                  <a:srgbClr val="22282E"/>
-                </a:solidFill>
-              </a:rPr>
-              <a:t>•  Pattern of life: patrón de vida (rutinas, horarios) deducido de la actividad. Característica: base para pretextos y también para riesgo físico.</a:t>
-            </a:r>
-          </a:p>
-          <a:p>
-            <a:pPr>
-              <a:spcAft>
-                <a:spcPts val="600"/>
-              </a:spcAft>
-            </a:pPr>
-            <a:r>
-              <a:rPr sz="1500">
-                <a:solidFill>
-                  <a:srgbClr val="22282E"/>
-                </a:solidFill>
-              </a:rPr>
-              <a:t>•  Scraping: extracción automatizada de contenido. Característica: útil pero frecuentemente contra ToS; usar con cautela.</a:t>
-            </a:r>
-          </a:p>
-          <a:p>
-            <a:pPr>
-              <a:spcAft>
-                <a:spcPts val="600"/>
-              </a:spcAft>
-            </a:pPr>
-            <a:r>
-              <a:rPr sz="1500">
-                <a:solidFill>
-                  <a:srgbClr val="22282E"/>
-                </a:solidFill>
-              </a:rPr>
-              <a:t>•  Exposición corporativa: datos de la empresa filtrados por empleados. Característica: vector real (fotos de oficinas, insignias, software).</a:t>
+              <a:t>•  Las redes sociales ordenan, recomiendan y eliminan contenido mediante reglas que el investigador no controla. Una captura representa una interfaz en un momento, no todo el historial. Cuentas…</a:t>
+            </a:r>
+          </a:p>
+          <a:p>
+            <a:pPr>
+              <a:spcAft>
+                <a:spcPts val="600"/>
+              </a:spcAft>
+            </a:pPr>
+            <a:r>
+              <a:rPr sz="1500">
+                <a:solidFill>
+                  <a:srgbClr val="22282E"/>
+                </a:solidFill>
+              </a:rPr>
+              <a:t>•  Una insignia o nombre visible es una señal de la cuenta, no prueba absoluta de quién operó una publicación concreta. Se examinan historia, enlaces desde canales oficiales, coherencia temporal y…</a:t>
+            </a:r>
+          </a:p>
+          <a:p>
+            <a:pPr>
+              <a:spcAft>
+                <a:spcPts val="600"/>
+              </a:spcAft>
+            </a:pPr>
+            <a:r>
+              <a:rPr sz="1500">
+                <a:solidFill>
+                  <a:srgbClr val="22282E"/>
+                </a:solidFill>
+              </a:rPr>
+              <a:t>•  Un grafo representa nodos y relaciones observadas: seguir, mencionar, responder, compartir. Una arista no equivale a amistad, mando ni coordinación. Para sostener coordinación se buscan patrones…</a:t>
+            </a:r>
+          </a:p>
+          <a:p>
+            <a:pPr>
+              <a:spcAft>
+                <a:spcPts val="600"/>
+              </a:spcAft>
+            </a:pPr>
+            <a:r>
+              <a:rPr sz="1500">
+                <a:solidFill>
+                  <a:srgbClr val="22282E"/>
+                </a:solidFill>
+              </a:rPr>
+              <a:t>•  Las APIs, términos de servicio y normas de privacidad delimitan la recopilación. Automatizar navegación o crear identidades encubiertas puede infringir reglas y aumentar riesgo; esta clase trabaja…</a:t>
+            </a:r>
+          </a:p>
+          <a:p>
+            <a:pPr>
+              <a:spcAft>
+                <a:spcPts val="600"/>
+              </a:spcAft>
+            </a:pPr>
+            <a:r>
+              <a:rPr sz="1500">
+                <a:solidFill>
+                  <a:srgbClr val="22282E"/>
+                </a:solidFill>
+              </a:rPr>
+              <a:t>•  Un video se comparte como prueba de un incidente actual. La búsqueda inversa encuentra copias de dos años antes y los edificios no coinciden con el lugar afirmado. El analista conserva la publicación…</a:t>
             </a:r>
           </a:p>
         </p:txBody>
@@ -4570,7 +5126,7 @@
                   <a:srgbClr val="0B3D2E"/>
                 </a:solidFill>
               </a:rPr>
-              <a:t>🧰 Herramientas y preparación</a:t>
+              <a:t>📔 Glosario operativo</a:t>
             </a:r>
           </a:p>
         </p:txBody>
@@ -4608,67 +5164,82 @@
                   <a:srgbClr val="22282E"/>
                 </a:solidFill>
               </a:rPr>
-              <a:t>•  Sock puppets por plataforma, sin vínculo a tu identidad; navegador con contenedores.</a:t>
-            </a:r>
-          </a:p>
-          <a:p>
-            <a:pPr>
-              <a:spcAft>
-                <a:spcPts val="600"/>
-              </a:spcAft>
-            </a:pPr>
-            <a:r>
-              <a:rPr sz="1500">
-                <a:solidFill>
-                  <a:srgbClr val="22282E"/>
-                </a:solidFill>
-              </a:rPr>
-              <a:t>•  Búsqueda y agregación: operadores de búsqueda avanzados, whatsmyname, agregadores públicos.</a:t>
-            </a:r>
-          </a:p>
-          <a:p>
-            <a:pPr>
-              <a:spcAft>
-                <a:spcPts val="600"/>
-              </a:spcAft>
-            </a:pPr>
-            <a:r>
-              <a:rPr sz="1500">
-                <a:solidFill>
-                  <a:srgbClr val="22282E"/>
-                </a:solidFill>
-              </a:rPr>
-              <a:t>•  Análisis: capturas con marca de tiempo, hojas de correlación; para grafos, Maltego (Clase 255).</a:t>
-            </a:r>
-          </a:p>
-          <a:p>
-            <a:pPr>
-              <a:spcAft>
-                <a:spcPts val="600"/>
-              </a:spcAft>
-            </a:pPr>
-            <a:r>
-              <a:rPr sz="1500">
-                <a:solidFill>
-                  <a:srgbClr val="22282E"/>
-                </a:solidFill>
-              </a:rPr>
-              <a:t>•  Verificación de imágenes: búsqueda inversa (Google Lens, Yandex) — enlaza con la Clase 253.</a:t>
-            </a:r>
-          </a:p>
-          <a:p>
-            <a:pPr>
-              <a:spcAft>
-                <a:spcPts val="600"/>
-              </a:spcAft>
-            </a:pPr>
-            <a:r>
-              <a:rPr sz="1500">
-                <a:solidFill>
-                  <a:srgbClr val="22282E"/>
-                </a:solidFill>
-              </a:rPr>
-              <a:t>•  Recordatorio: solo contenido público; nada de solicitar amistad al objetivo fuera de un engagement.</a:t>
+              <a:t>•  Término — Definición útil</a:t>
+            </a:r>
+          </a:p>
+          <a:p>
+            <a:pPr>
+              <a:spcAft>
+                <a:spcPts val="600"/>
+              </a:spcAft>
+            </a:pPr>
+            <a:r>
+              <a:rPr sz="1500">
+                <a:solidFill>
+                  <a:srgbClr val="22282E"/>
+                </a:solidFill>
+              </a:rPr>
+              <a:t>•  Contexto conversacional — Publicaciones y respuestas necesarias para interpretar un mensaje.</a:t>
+            </a:r>
+          </a:p>
+          <a:p>
+            <a:pPr>
+              <a:spcAft>
+                <a:spcPts val="600"/>
+              </a:spcAft>
+            </a:pPr>
+            <a:r>
+              <a:rPr sz="1500">
+                <a:solidFill>
+                  <a:srgbClr val="22282E"/>
+                </a:solidFill>
+              </a:rPr>
+              <a:t>•  Grafo observado — Red limitada por la muestra y las relaciones disponibles.</a:t>
+            </a:r>
+          </a:p>
+          <a:p>
+            <a:pPr>
+              <a:spcAft>
+                <a:spcPts val="600"/>
+              </a:spcAft>
+            </a:pPr>
+            <a:r>
+              <a:rPr sz="1500">
+                <a:solidFill>
+                  <a:srgbClr val="22282E"/>
+                </a:solidFill>
+              </a:rPr>
+              <a:t>•  Coordinación — Comportamiento conjunto que requiere más evidencia que contenido parecido.</a:t>
+            </a:r>
+          </a:p>
+          <a:p>
+            <a:pPr>
+              <a:spcAft>
+                <a:spcPts val="600"/>
+              </a:spcAft>
+            </a:pPr>
+            <a:r>
+              <a:rPr sz="1500">
+                <a:solidFill>
+                  <a:srgbClr val="22282E"/>
+                </a:solidFill>
+              </a:rPr>
+              <a:t>•  Descontextualización — Uso de material auténtico con fecha, lugar o significado incorrecto.</a:t>
+            </a:r>
+          </a:p>
+          <a:p>
+            <a:pPr>
+              <a:spcAft>
+                <a:spcPts val="600"/>
+              </a:spcAft>
+            </a:pPr>
+            <a:r>
+              <a:rPr sz="1500">
+                <a:solidFill>
+                  <a:srgbClr val="22282E"/>
+                </a:solidFill>
+              </a:rPr>
+              <a:t>•  Identificador de publicación — Clave estable de plataforma preferible a una captura aislada.</a:t>
             </a:r>
           </a:p>
         </p:txBody>
@@ -4719,7 +5290,7 @@
                   <a:srgbClr val="0B3D2E"/>
                 </a:solidFill>
               </a:rPr>
-              <a:t>🧪 Laboratorio guiado</a:t>
+              <a:t>✅ Criterio de dominio</a:t>
             </a:r>
           </a:p>
         </p:txBody>
@@ -4757,97 +5328,7 @@
                   <a:srgbClr val="22282E"/>
                 </a:solidFill>
               </a:rPr>
-              <a:t>•  Objetivo: tus propias cuentas o una cuenta pública de prueba/consentida.</a:t>
-            </a:r>
-          </a:p>
-          <a:p>
-            <a:pPr>
-              <a:spcAft>
-                <a:spcPts val="600"/>
-              </a:spcAft>
-            </a:pPr>
-            <a:r>
-              <a:rPr sz="1500">
-                <a:solidFill>
-                  <a:srgbClr val="22282E"/>
-                </a:solidFill>
-              </a:rPr>
-              <a:t>•  Inventaria tus perfiles públicos y captura cada bio, foto y enlace con fecha.</a:t>
-            </a:r>
-          </a:p>
-          <a:p>
-            <a:pPr>
-              <a:spcAft>
-                <a:spcPts val="600"/>
-              </a:spcAft>
-            </a:pPr>
-            <a:r>
-              <a:rPr sz="1500">
-                <a:solidFill>
-                  <a:srgbClr val="22282E"/>
-                </a:solidFill>
-              </a:rPr>
-              <a:t>•  Extrae señales: ubicación declarada, empleador, intereses, cuentas enlazadas.</a:t>
-            </a:r>
-          </a:p>
-          <a:p>
-            <a:pPr>
-              <a:spcAft>
-                <a:spcPts val="600"/>
-              </a:spcAft>
-            </a:pPr>
-            <a:r>
-              <a:rPr sz="1500">
-                <a:solidFill>
-                  <a:srgbClr val="22282E"/>
-                </a:solidFill>
-              </a:rPr>
-              <a:t>•  Correlaciona un alias entre plataformas con whatsmyname y verifica manualmente.</a:t>
-            </a:r>
-          </a:p>
-          <a:p>
-            <a:pPr>
-              <a:spcAft>
-                <a:spcPts val="600"/>
-              </a:spcAft>
-            </a:pPr>
-            <a:r>
-              <a:rPr sz="1500">
-                <a:solidFill>
-                  <a:srgbClr val="22282E"/>
-                </a:solidFill>
-              </a:rPr>
-              <a:t>•  Busca geotags: revisa publicaciones públicas con ubicación y traza un mapa de lugares frecuentes.</a:t>
-            </a:r>
-          </a:p>
-          <a:p>
-            <a:pPr>
-              <a:spcAft>
-                <a:spcPts val="600"/>
-              </a:spcAft>
-            </a:pPr>
-            <a:r>
-              <a:rPr sz="1500">
-                <a:solidFill>
-                  <a:srgbClr val="22282E"/>
-                </a:solidFill>
-              </a:rPr>
-              <a:t>•  Deriva un pattern of life aproximado (horarios de publicación, días activos).</a:t>
-            </a:r>
-          </a:p>
-          <a:p>
-            <a:pPr>
-              <a:spcAft>
-                <a:spcPts val="600"/>
-              </a:spcAft>
-            </a:pPr>
-            <a:r>
-              <a:rPr sz="1500">
-                <a:solidFill>
-                  <a:srgbClr val="22282E"/>
-                </a:solidFill>
-              </a:rPr>
-              <a:t>•  Simula la perspectiva de un atacante: ¿qué pretexto construirías con estos datos?</a:t>
+              <a:t>•  Existe dominio cuando el alumno preserva una publicación con contexto, evalúa cuenta, tiempo, multimedia y red por separado, formula alternativas y explica cómo la plataforma y el método de colección…</a:t>
             </a:r>
           </a:p>
         </p:txBody>
@@ -4898,7 +5379,7 @@
                   <a:srgbClr val="0B3D2E"/>
                 </a:solidFill>
               </a:rPr>
-              <a:t>✍️ Ejercicios</a:t>
+              <a:t>📖 Definiciones y características</a:t>
             </a:r>
           </a:p>
         </p:txBody>
@@ -4936,82 +5417,82 @@
                   <a:srgbClr val="22282E"/>
                 </a:solidFill>
               </a:rPr>
-              <a:t>•  Analiza un perfil propio y lista 10 señales OSINT ordenadas por sensibilidad.</a:t>
-            </a:r>
-          </a:p>
-          <a:p>
-            <a:pPr>
-              <a:spcAft>
-                <a:spcPts val="600"/>
-              </a:spcAft>
-            </a:pPr>
-            <a:r>
-              <a:rPr sz="1500">
-                <a:solidFill>
-                  <a:srgbClr val="22282E"/>
-                </a:solidFill>
-              </a:rPr>
-              <a:t>•  Explica por qué el "pattern of life" es peligroso incluso sin datos "secretos".</a:t>
-            </a:r>
-          </a:p>
-          <a:p>
-            <a:pPr>
-              <a:spcAft>
-                <a:spcPts val="600"/>
-              </a:spcAft>
-            </a:pPr>
-            <a:r>
-              <a:rPr sz="1500">
-                <a:solidFill>
-                  <a:srgbClr val="22282E"/>
-                </a:solidFill>
-              </a:rPr>
-              <a:t>•  Correlaciona dos cuentas por estilo, foto o enlaces y asigna un nivel de confianza.</a:t>
-            </a:r>
-          </a:p>
-          <a:p>
-            <a:pPr>
-              <a:spcAft>
-                <a:spcPts val="600"/>
-              </a:spcAft>
-            </a:pPr>
-            <a:r>
-              <a:rPr sz="1500">
-                <a:solidFill>
-                  <a:srgbClr val="22282E"/>
-                </a:solidFill>
-              </a:rPr>
-              <a:t>•  Encuentra una publicación con geotag y descríbela sin exponer datos de terceros.</a:t>
-            </a:r>
-          </a:p>
-          <a:p>
-            <a:pPr>
-              <a:spcAft>
-                <a:spcPts val="600"/>
-              </a:spcAft>
-            </a:pPr>
-            <a:r>
-              <a:rPr sz="1500">
-                <a:solidFill>
-                  <a:srgbClr val="22282E"/>
-                </a:solidFill>
-              </a:rPr>
-              <a:t>•  Redacta una política de 5 puntos para que empleados no filtren datos corporativos.</a:t>
-            </a:r>
-          </a:p>
-          <a:p>
-            <a:pPr>
-              <a:spcAft>
-                <a:spcPts val="600"/>
-              </a:spcAft>
-            </a:pPr>
-            <a:r>
-              <a:rPr sz="1500">
-                <a:solidFill>
-                  <a:srgbClr val="22282E"/>
-                </a:solidFill>
-              </a:rPr>
-              <a:t>•  Investiga qué prohíben los ToS de una red sobre scraping y automatización.</a:t>
+              <a:t>•  SOCMINT: inteligencia derivada de redes sociales. Característica: alta densidad de datos personales, alto riesgo ético.</a:t>
+            </a:r>
+          </a:p>
+          <a:p>
+            <a:pPr>
+              <a:spcAft>
+                <a:spcPts val="600"/>
+              </a:spcAft>
+            </a:pPr>
+            <a:r>
+              <a:rPr sz="1500">
+                <a:solidFill>
+                  <a:srgbClr val="22282E"/>
+                </a:solidFill>
+              </a:rPr>
+              <a:t>•  Geotag: metadato o etiqueta de ubicación en una publicación. Característica: permite reconstruir movimientos.</a:t>
+            </a:r>
+          </a:p>
+          <a:p>
+            <a:pPr>
+              <a:spcAft>
+                <a:spcPts val="600"/>
+              </a:spcAft>
+            </a:pPr>
+            <a:r>
+              <a:rPr sz="1500">
+                <a:solidFill>
+                  <a:srgbClr val="22282E"/>
+                </a:solidFill>
+              </a:rPr>
+              <a:t>•  Análisis de red social: estudio de conexiones entre cuentas. Característica: revela círculos y personas clave.</a:t>
+            </a:r>
+          </a:p>
+          <a:p>
+            <a:pPr>
+              <a:spcAft>
+                <a:spcPts val="600"/>
+              </a:spcAft>
+            </a:pPr>
+            <a:r>
+              <a:rPr sz="1500">
+                <a:solidFill>
+                  <a:srgbClr val="22282E"/>
+                </a:solidFill>
+              </a:rPr>
+              <a:t>•  Pattern of life: patrón de vida (rutinas, horarios) deducido de la actividad. Característica: base para pretextos y también para riesgo físico.</a:t>
+            </a:r>
+          </a:p>
+          <a:p>
+            <a:pPr>
+              <a:spcAft>
+                <a:spcPts val="600"/>
+              </a:spcAft>
+            </a:pPr>
+            <a:r>
+              <a:rPr sz="1500">
+                <a:solidFill>
+                  <a:srgbClr val="22282E"/>
+                </a:solidFill>
+              </a:rPr>
+              <a:t>•  Scraping: extracción automatizada de contenido. Característica: útil pero frecuentemente contra ToS; usar con cautela.</a:t>
+            </a:r>
+          </a:p>
+          <a:p>
+            <a:pPr>
+              <a:spcAft>
+                <a:spcPts val="600"/>
+              </a:spcAft>
+            </a:pPr>
+            <a:r>
+              <a:rPr sz="1500">
+                <a:solidFill>
+                  <a:srgbClr val="22282E"/>
+                </a:solidFill>
+              </a:rPr>
+              <a:t>•  Exposición corporativa: datos de la empresa filtrados por empleados. Característica: vector real (fotos de oficinas, insignias, software).</a:t>
             </a:r>
           </a:p>
         </p:txBody>
